--- a/submissions/midterm-presentation-deck.pptx
+++ b/submissions/midterm-presentation-deck.pptx
@@ -121,13 +121,13 @@
   <p:extLst>
     <p:ext uri="{521415D9-36F7-43E2-AB2F-B90AF26B5E84}">
       <p14:sectionLst xmlns:p14="http://schemas.microsoft.com/office/powerpoint/2010/main">
-        <p14:section name="Introduction" id="{eee86fc5-7660-f058-b6cf-1f54392fbc94}">
+        <p14:section name="Introduction" id="{30694cb6-1566-a438-c9f0-b8eab43d3270}">
           <p14:sldIdLst>
             <p14:sldId id="256"/>
             <p14:sldId id="257"/>
           </p14:sldIdLst>
         </p14:section>
-        <p14:section name="Completed work" id="{ec886628-aefd-af6f-def6-b09f87bacca6}">
+        <p14:section name="Completed work" id="{e6eb73ba-983c-51ab-096d-fbfe86258a8c}">
           <p14:sldIdLst>
             <p14:sldId id="258"/>
             <p14:sldId id="259"/>
@@ -141,7 +141,7 @@
             <p14:sldId id="267"/>
           </p14:sldIdLst>
         </p14:section>
-        <p14:section name="Plan" id="{38ac450e-0cce-1e64-2ade-2186724df604}">
+        <p14:section name="Plan" id="{03054731-af21-f408-43d7-42f83c4bbfa9}">
           <p14:sldIdLst>
             <p14:sldId id="268"/>
             <p14:sldId id="269"/>
@@ -3379,7 +3379,7 @@
       </p:grpSpPr>
       <p:pic>
         <p:nvPicPr>
-          <p:cNvPr id="2" name="Image 0" descr="/private/tmp/ps-deck-wt/submissions/assets/2026-10-16/fig_photo_s05.jpg">    </p:cNvPr>
+          <p:cNvPr id="2" name="Image 0" descr="submissions/assets/2026-10-16/fig_photo_s05.jpg">    </p:cNvPr>
           <p:cNvPicPr>
             <a:picLocks noChangeAspect="1"/>
           </p:cNvPicPr>
@@ -4729,7 +4729,7 @@
       </p:sp>
       <p:pic>
         <p:nvPicPr>
-          <p:cNvPr id="5" name="Image 0" descr="/private/tmp/ps-deck-wt/submissions/assets/2026-10-16/fig_confidence.jpg">    </p:cNvPr>
+          <p:cNvPr id="5" name="Image 0" descr="submissions/assets/2026-10-16/fig_confidence.jpg">    </p:cNvPr>
           <p:cNvPicPr>
             <a:picLocks noChangeAspect="1"/>
           </p:cNvPicPr>
@@ -13324,9 +13324,9 @@
           <a:noFill/>
           <a:ln w="19050">
             <a:solidFill>
-              <a:schemeClr val="accent4"/>
+              <a:schemeClr val="accent2"/>
             </a:solidFill>
-            <a:prstDash val="solid"/>
+            <a:prstDash val="dash"/>
             <a:headEnd type="triangle"/>
             <a:tailEnd type="triangle"/>
           </a:ln>
@@ -13384,7 +13384,71 @@
       </p:sp>
       <p:sp>
         <p:nvSpPr>
-          <p:cNvPr id="11" name="Shape 8"/>
+          <p:cNvPr id="11" name="Text 8"/>
+          <p:cNvSpPr txBox="1"/>
+          <p:nvPr/>
+        </p:nvSpPr>
+        <p:spPr>
+          <a:xfrm>
+            <a:off x="2615184" y="2715768"/>
+            <a:ext cx="804672" cy="566928"/>
+          </a:xfrm>
+          <a:prstGeom prst="rect">
+            <a:avLst/>
+          </a:prstGeom>
+          <a:noFill/>
+          <a:ln/>
+        </p:spPr>
+        <p:txBody>
+          <a:bodyPr wrap="square" lIns="0" tIns="0" rIns="0" bIns="0" rtlCol="0" anchor="t"/>
+          <a:lstStyle/>
+          <a:p>
+            <a:pPr algn="ctr" indent="0" marL="0">
+              <a:buNone/>
+            </a:pPr>
+            <a:r>
+              <a:rPr lang="en-US" sz="900" i="1" dirty="0">
+                <a:solidFill>
+                  <a:schemeClr val="accent2"/>
+                </a:solidFill>
+              </a:rPr>
+              <a:t>live link</a:t>
+            </a:r>
+            <a:endParaRPr lang="en-US" sz="900" dirty="0"/>
+          </a:p>
+          <a:p>
+            <a:pPr algn="ctr" indent="0" marL="0">
+              <a:buNone/>
+            </a:pPr>
+            <a:r>
+              <a:rPr lang="en-US" sz="900" i="1" dirty="0">
+                <a:solidFill>
+                  <a:schemeClr val="accent2"/>
+                </a:solidFill>
+              </a:rPr>
+              <a:t>not yet</a:t>
+            </a:r>
+            <a:endParaRPr lang="en-US" sz="900" dirty="0"/>
+          </a:p>
+          <a:p>
+            <a:pPr algn="ctr" indent="0" marL="0">
+              <a:buNone/>
+            </a:pPr>
+            <a:r>
+              <a:rPr lang="en-US" sz="900" i="1" dirty="0">
+                <a:solidFill>
+                  <a:schemeClr val="accent2"/>
+                </a:solidFill>
+              </a:rPr>
+              <a:t>confirmed</a:t>
+            </a:r>
+            <a:endParaRPr lang="en-US" sz="900" dirty="0"/>
+          </a:p>
+        </p:txBody>
+      </p:sp>
+      <p:sp>
+        <p:nvSpPr>
+          <p:cNvPr id="12" name="Shape 9"/>
           <p:cNvSpPr/>
           <p:nvPr/>
         </p:nvSpPr>
@@ -13411,7 +13475,7 @@
       </p:sp>
       <p:sp>
         <p:nvSpPr>
-          <p:cNvPr id="12" name="Text 9"/>
+          <p:cNvPr id="13" name="Text 10"/>
           <p:cNvSpPr txBox="1"/>
           <p:nvPr/>
         </p:nvSpPr>
@@ -13447,7 +13511,7 @@
       </p:sp>
       <p:sp>
         <p:nvSpPr>
-          <p:cNvPr id="13" name="Shape 10"/>
+          <p:cNvPr id="14" name="Shape 11"/>
           <p:cNvSpPr/>
           <p:nvPr/>
         </p:nvSpPr>
@@ -13474,7 +13538,7 @@
       </p:sp>
       <p:sp>
         <p:nvSpPr>
-          <p:cNvPr id="14" name="Text 11"/>
+          <p:cNvPr id="15" name="Text 12"/>
           <p:cNvSpPr txBox="1"/>
           <p:nvPr/>
         </p:nvSpPr>
@@ -13510,7 +13574,7 @@
       </p:sp>
       <p:sp>
         <p:nvSpPr>
-          <p:cNvPr id="15" name="Text 12"/>
+          <p:cNvPr id="16" name="Text 13"/>
           <p:cNvSpPr txBox="1"/>
           <p:nvPr/>
         </p:nvSpPr>
@@ -13560,7 +13624,7 @@
       </p:sp>
       <p:sp>
         <p:nvSpPr>
-          <p:cNvPr id="16" name="Shape 13"/>
+          <p:cNvPr id="17" name="Shape 14"/>
           <p:cNvSpPr/>
           <p:nvPr/>
         </p:nvSpPr>
@@ -13584,7 +13648,7 @@
       </p:sp>
       <p:sp>
         <p:nvSpPr>
-          <p:cNvPr id="17" name="Shape 14"/>
+          <p:cNvPr id="18" name="Shape 15"/>
           <p:cNvSpPr/>
           <p:nvPr/>
         </p:nvSpPr>
@@ -13611,7 +13675,7 @@
       </p:sp>
       <p:sp>
         <p:nvSpPr>
-          <p:cNvPr id="18" name="Text 15"/>
+          <p:cNvPr id="19" name="Text 16"/>
           <p:cNvSpPr txBox="1"/>
           <p:nvPr/>
         </p:nvSpPr>
@@ -13647,7 +13711,7 @@
       </p:sp>
       <p:sp>
         <p:nvSpPr>
-          <p:cNvPr id="19" name="Text 16"/>
+          <p:cNvPr id="20" name="Text 17"/>
           <p:cNvSpPr txBox="1"/>
           <p:nvPr/>
         </p:nvSpPr>
@@ -13697,7 +13761,7 @@
       </p:sp>
       <p:sp>
         <p:nvSpPr>
-          <p:cNvPr id="20" name="Shape 17"/>
+          <p:cNvPr id="21" name="Shape 18"/>
           <p:cNvSpPr/>
           <p:nvPr/>
         </p:nvSpPr>
@@ -13721,7 +13785,7 @@
       </p:sp>
       <p:sp>
         <p:nvSpPr>
-          <p:cNvPr id="21" name="Shape 18"/>
+          <p:cNvPr id="22" name="Shape 19"/>
           <p:cNvSpPr/>
           <p:nvPr/>
         </p:nvSpPr>
@@ -13748,7 +13812,7 @@
       </p:sp>
       <p:sp>
         <p:nvSpPr>
-          <p:cNvPr id="22" name="Text 19"/>
+          <p:cNvPr id="23" name="Text 20"/>
           <p:cNvSpPr txBox="1"/>
           <p:nvPr/>
         </p:nvSpPr>
@@ -13784,7 +13848,7 @@
       </p:sp>
       <p:sp>
         <p:nvSpPr>
-          <p:cNvPr id="23" name="Text 20"/>
+          <p:cNvPr id="24" name="Text 21"/>
           <p:cNvSpPr txBox="1"/>
           <p:nvPr/>
         </p:nvSpPr>
@@ -13834,7 +13898,7 @@
       </p:sp>
       <p:sp>
         <p:nvSpPr>
-          <p:cNvPr id="24" name="Shape 21"/>
+          <p:cNvPr id="25" name="Shape 22"/>
           <p:cNvSpPr/>
           <p:nvPr/>
         </p:nvSpPr>
@@ -13858,7 +13922,7 @@
       </p:sp>
       <p:sp>
         <p:nvSpPr>
-          <p:cNvPr id="25" name="Shape 22"/>
+          <p:cNvPr id="26" name="Shape 23"/>
           <p:cNvSpPr/>
           <p:nvPr/>
         </p:nvSpPr>
@@ -13885,7 +13949,7 @@
       </p:sp>
       <p:sp>
         <p:nvSpPr>
-          <p:cNvPr id="26" name="Text 23"/>
+          <p:cNvPr id="27" name="Text 24"/>
           <p:cNvSpPr txBox="1"/>
           <p:nvPr/>
         </p:nvSpPr>
@@ -13921,7 +13985,7 @@
       </p:sp>
       <p:sp>
         <p:nvSpPr>
-          <p:cNvPr id="27" name="Text 24"/>
+          <p:cNvPr id="28" name="Text 25"/>
           <p:cNvSpPr txBox="1"/>
           <p:nvPr/>
         </p:nvSpPr>
@@ -13971,7 +14035,7 @@
       </p:sp>
       <p:sp>
         <p:nvSpPr>
-          <p:cNvPr id="28" name="Shape 25"/>
+          <p:cNvPr id="29" name="Shape 26"/>
           <p:cNvSpPr/>
           <p:nvPr/>
         </p:nvSpPr>
@@ -13998,7 +14062,7 @@
       </p:sp>
       <p:sp>
         <p:nvSpPr>
-          <p:cNvPr id="29" name="Text 26"/>
+          <p:cNvPr id="30" name="Text 27"/>
           <p:cNvSpPr txBox="1"/>
           <p:nvPr/>
         </p:nvSpPr>
@@ -14034,7 +14098,7 @@
       </p:sp>
       <p:sp>
         <p:nvSpPr>
-          <p:cNvPr id="30" name="Text 27"/>
+          <p:cNvPr id="31" name="Text 28"/>
           <p:cNvSpPr txBox="1"/>
           <p:nvPr/>
         </p:nvSpPr>
@@ -14084,7 +14148,7 @@
       </p:sp>
       <p:sp>
         <p:nvSpPr>
-          <p:cNvPr id="31" name="Shape 28"/>
+          <p:cNvPr id="32" name="Shape 29"/>
           <p:cNvSpPr/>
           <p:nvPr/>
         </p:nvSpPr>
@@ -14108,7 +14172,7 @@
       </p:sp>
       <p:sp>
         <p:nvSpPr>
-          <p:cNvPr id="32" name="Shape 29"/>
+          <p:cNvPr id="33" name="Shape 30"/>
           <p:cNvSpPr/>
           <p:nvPr/>
         </p:nvSpPr>
@@ -14135,7 +14199,7 @@
       </p:sp>
       <p:sp>
         <p:nvSpPr>
-          <p:cNvPr id="33" name="Text 30"/>
+          <p:cNvPr id="34" name="Text 31"/>
           <p:cNvSpPr txBox="1"/>
           <p:nvPr/>
         </p:nvSpPr>
@@ -14171,7 +14235,7 @@
       </p:sp>
       <p:sp>
         <p:nvSpPr>
-          <p:cNvPr id="34" name="Text 31"/>
+          <p:cNvPr id="35" name="Text 32"/>
           <p:cNvSpPr txBox="1"/>
           <p:nvPr/>
         </p:nvSpPr>
@@ -14207,7 +14271,7 @@
       </p:sp>
       <p:sp>
         <p:nvSpPr>
-          <p:cNvPr id="35" name="Shape 32"/>
+          <p:cNvPr id="36" name="Shape 33"/>
           <p:cNvSpPr/>
           <p:nvPr/>
         </p:nvSpPr>
@@ -14231,7 +14295,7 @@
       </p:sp>
       <p:sp>
         <p:nvSpPr>
-          <p:cNvPr id="36" name="Shape 33"/>
+          <p:cNvPr id="37" name="Shape 34"/>
           <p:cNvSpPr/>
           <p:nvPr/>
         </p:nvSpPr>
@@ -14258,7 +14322,7 @@
       </p:sp>
       <p:sp>
         <p:nvSpPr>
-          <p:cNvPr id="37" name="Text 34"/>
+          <p:cNvPr id="38" name="Text 35"/>
           <p:cNvSpPr txBox="1"/>
           <p:nvPr/>
         </p:nvSpPr>
@@ -14294,7 +14358,7 @@
       </p:sp>
       <p:sp>
         <p:nvSpPr>
-          <p:cNvPr id="38" name="Text 35"/>
+          <p:cNvPr id="39" name="Text 36"/>
           <p:cNvSpPr txBox="1"/>
           <p:nvPr/>
         </p:nvSpPr>
@@ -14344,7 +14408,7 @@
       </p:sp>
       <p:sp>
         <p:nvSpPr>
-          <p:cNvPr id="39" name="Shape 36"/>
+          <p:cNvPr id="40" name="Shape 37"/>
           <p:cNvSpPr/>
           <p:nvPr/>
         </p:nvSpPr>
@@ -14368,7 +14432,7 @@
       </p:sp>
       <p:sp>
         <p:nvSpPr>
-          <p:cNvPr id="40" name="Shape 37"/>
+          <p:cNvPr id="41" name="Shape 38"/>
           <p:cNvSpPr/>
           <p:nvPr/>
         </p:nvSpPr>
@@ -14395,7 +14459,7 @@
       </p:sp>
       <p:sp>
         <p:nvSpPr>
-          <p:cNvPr id="41" name="Text 38"/>
+          <p:cNvPr id="42" name="Text 39"/>
           <p:cNvSpPr txBox="1"/>
           <p:nvPr/>
         </p:nvSpPr>
@@ -14431,7 +14495,7 @@
       </p:sp>
       <p:sp>
         <p:nvSpPr>
-          <p:cNvPr id="42" name="Text 39"/>
+          <p:cNvPr id="43" name="Text 40"/>
           <p:cNvSpPr txBox="1"/>
           <p:nvPr/>
         </p:nvSpPr>
@@ -14481,7 +14545,7 @@
       </p:sp>
       <p:sp>
         <p:nvSpPr>
-          <p:cNvPr id="43" name="Text 40"/>
+          <p:cNvPr id="44" name="Text 41"/>
           <p:cNvSpPr txBox="1"/>
           <p:nvPr/>
         </p:nvSpPr>
@@ -14517,7 +14581,7 @@
       </p:sp>
       <p:sp>
         <p:nvSpPr>
-          <p:cNvPr id="44" name="Shape 41"/>
+          <p:cNvPr id="45" name="Shape 42"/>
           <p:cNvSpPr/>
           <p:nvPr/>
         </p:nvSpPr>
@@ -14544,7 +14608,7 @@
       </p:sp>
       <p:pic>
         <p:nvPicPr>
-          <p:cNvPr id="45" name="Image 1" descr="preencoded.png">    </p:cNvPr>
+          <p:cNvPr id="46" name="Image 1" descr="preencoded.png">    </p:cNvPr>
           <p:cNvPicPr>
             <a:picLocks noChangeAspect="1"/>
           </p:cNvPicPr>
@@ -14568,7 +14632,7 @@
       </p:pic>
       <p:sp>
         <p:nvSpPr>
-          <p:cNvPr id="46" name="Text 42"/>
+          <p:cNvPr id="47" name="Text 43"/>
           <p:cNvSpPr txBox="1"/>
           <p:nvPr/>
         </p:nvSpPr>
@@ -14607,7 +14671,7 @@
       </p:sp>
       <p:sp>
         <p:nvSpPr>
-          <p:cNvPr id="47" name="Text 43"/>
+          <p:cNvPr id="48" name="Text 44"/>
           <p:cNvSpPr txBox="1"/>
           <p:nvPr/>
         </p:nvSpPr>
@@ -14643,7 +14707,7 @@
       </p:sp>
       <p:sp>
         <p:nvSpPr>
-          <p:cNvPr id="48" name="Text 44"/>
+          <p:cNvPr id="49" name="Text 45"/>
           <p:cNvSpPr txBox="1"/>
           <p:nvPr/>
         </p:nvSpPr>
@@ -14679,7 +14743,7 @@
       </p:sp>
       <p:sp>
         <p:nvSpPr>
-          <p:cNvPr id="49" name="Shape 45"/>
+          <p:cNvPr id="50" name="Shape 46"/>
           <p:cNvSpPr/>
           <p:nvPr/>
         </p:nvSpPr>
@@ -14706,7 +14770,7 @@
       </p:sp>
       <p:pic>
         <p:nvPicPr>
-          <p:cNvPr id="50" name="Image 2" descr="preencoded.png">    </p:cNvPr>
+          <p:cNvPr id="51" name="Image 2" descr="preencoded.png">    </p:cNvPr>
           <p:cNvPicPr>
             <a:picLocks noChangeAspect="1"/>
           </p:cNvPicPr>
@@ -14730,7 +14794,7 @@
       </p:pic>
       <p:sp>
         <p:nvSpPr>
-          <p:cNvPr id="51" name="Text 46"/>
+          <p:cNvPr id="52" name="Text 47"/>
           <p:cNvSpPr txBox="1"/>
           <p:nvPr/>
         </p:nvSpPr>
@@ -14769,7 +14833,7 @@
       </p:sp>
       <p:sp>
         <p:nvSpPr>
-          <p:cNvPr id="52" name="Text 47"/>
+          <p:cNvPr id="53" name="Text 48"/>
           <p:cNvSpPr txBox="1"/>
           <p:nvPr/>
         </p:nvSpPr>
@@ -14805,7 +14869,7 @@
       </p:sp>
       <p:sp>
         <p:nvSpPr>
-          <p:cNvPr id="53" name="Text 48"/>
+          <p:cNvPr id="54" name="Text 49"/>
           <p:cNvSpPr txBox="1"/>
           <p:nvPr/>
         </p:nvSpPr>
@@ -14841,7 +14905,7 @@
       </p:sp>
       <p:sp>
         <p:nvSpPr>
-          <p:cNvPr id="54" name="Shape 49"/>
+          <p:cNvPr id="55" name="Shape 50"/>
           <p:cNvSpPr/>
           <p:nvPr/>
         </p:nvSpPr>
@@ -14868,7 +14932,7 @@
       </p:sp>
       <p:pic>
         <p:nvPicPr>
-          <p:cNvPr id="55" name="Image 3" descr="preencoded.png">    </p:cNvPr>
+          <p:cNvPr id="56" name="Image 3" descr="preencoded.png">    </p:cNvPr>
           <p:cNvPicPr>
             <a:picLocks noChangeAspect="1"/>
           </p:cNvPicPr>
@@ -14892,7 +14956,7 @@
       </p:pic>
       <p:sp>
         <p:nvSpPr>
-          <p:cNvPr id="56" name="Text 50"/>
+          <p:cNvPr id="57" name="Text 51"/>
           <p:cNvSpPr txBox="1"/>
           <p:nvPr/>
         </p:nvSpPr>
@@ -14931,7 +14995,7 @@
       </p:sp>
       <p:sp>
         <p:nvSpPr>
-          <p:cNvPr id="57" name="Text 51"/>
+          <p:cNvPr id="58" name="Text 52"/>
           <p:cNvSpPr txBox="1"/>
           <p:nvPr/>
         </p:nvSpPr>
@@ -14967,7 +15031,7 @@
       </p:sp>
       <p:sp>
         <p:nvSpPr>
-          <p:cNvPr id="58" name="Text 52"/>
+          <p:cNvPr id="59" name="Text 53"/>
           <p:cNvSpPr txBox="1"/>
           <p:nvPr/>
         </p:nvSpPr>
@@ -15003,7 +15067,7 @@
       </p:sp>
       <p:sp>
         <p:nvSpPr>
-          <p:cNvPr id="59" name="Shape 53"/>
+          <p:cNvPr id="60" name="Shape 54"/>
           <p:cNvSpPr/>
           <p:nvPr/>
         </p:nvSpPr>
@@ -15030,7 +15094,7 @@
       </p:sp>
       <p:pic>
         <p:nvPicPr>
-          <p:cNvPr id="60" name="Image 4" descr="preencoded.png">    </p:cNvPr>
+          <p:cNvPr id="61" name="Image 4" descr="preencoded.png">    </p:cNvPr>
           <p:cNvPicPr>
             <a:picLocks noChangeAspect="1"/>
           </p:cNvPicPr>
@@ -15054,7 +15118,7 @@
       </p:pic>
       <p:sp>
         <p:nvSpPr>
-          <p:cNvPr id="61" name="Text 54"/>
+          <p:cNvPr id="62" name="Text 55"/>
           <p:cNvSpPr txBox="1"/>
           <p:nvPr/>
         </p:nvSpPr>
@@ -15093,7 +15157,7 @@
       </p:sp>
       <p:sp>
         <p:nvSpPr>
-          <p:cNvPr id="62" name="Text 55"/>
+          <p:cNvPr id="63" name="Text 56"/>
           <p:cNvSpPr txBox="1"/>
           <p:nvPr/>
         </p:nvSpPr>
@@ -15129,7 +15193,7 @@
       </p:sp>
       <p:sp>
         <p:nvSpPr>
-          <p:cNvPr id="63" name="Text 56"/>
+          <p:cNvPr id="64" name="Text 57"/>
           <p:cNvSpPr txBox="1"/>
           <p:nvPr/>
         </p:nvSpPr>
@@ -15999,7 +16063,7 @@
       </p:sp>
       <p:pic>
         <p:nvPicPr>
-          <p:cNvPr id="5" name="Image 0" descr="/private/tmp/ps-deck-wt/submissions/assets/2026-10-16/fig_cameras.png">    </p:cNvPr>
+          <p:cNvPr id="5" name="Image 0" descr="submissions/assets/2026-10-16/fig_cameras.png">    </p:cNvPr>
           <p:cNvPicPr>
             <a:picLocks noChangeAspect="1"/>
           </p:cNvPicPr>
@@ -16694,7 +16758,7 @@
       </p:sp>
       <p:pic>
         <p:nvPicPr>
-          <p:cNvPr id="5" name="Image 0" descr="/private/tmp/ps-deck-wt/submissions/assets/2026-10-16/fig_pipeline_strip.jpg">    </p:cNvPr>
+          <p:cNvPr id="5" name="Image 0" descr="submissions/assets/2026-10-16/fig_pipeline_strip.jpg">    </p:cNvPr>
           <p:cNvPicPr>
             <a:picLocks noChangeAspect="1"/>
           </p:cNvPicPr>
@@ -17012,7 +17076,7 @@
       </p:sp>
       <p:pic>
         <p:nvPicPr>
-          <p:cNvPr id="5" name="Image 0" descr="/private/tmp/ps-deck-wt/submissions/assets/2026-10-16/fig_provenance.jpg">    </p:cNvPr>
+          <p:cNvPr id="5" name="Image 0" descr="submissions/assets/2026-10-16/fig_provenance.jpg">    </p:cNvPr>
           <p:cNvPicPr>
             <a:picLocks noChangeAspect="1"/>
           </p:cNvPicPr>
@@ -18035,7 +18099,7 @@
       </p:sp>
       <p:pic>
         <p:nvPicPr>
-          <p:cNvPr id="7" name="Image 0" descr="/private/tmp/ps-deck-wt/submissions/assets/2026-10-16/fig_desktop_capture.jpg">    </p:cNvPr>
+          <p:cNvPr id="7" name="Image 0" descr="submissions/assets/2026-10-16/fig_desktop_capture.jpg">    </p:cNvPr>
           <p:cNvPicPr>
             <a:picLocks noChangeAspect="1"/>
           </p:cNvPicPr>
@@ -18122,7 +18186,7 @@
       </p:sp>
       <p:pic>
         <p:nvPicPr>
-          <p:cNvPr id="10" name="Image 1" descr="/private/tmp/ps-deck-wt/submissions/assets/2026-10-16/fig_desktop_viewer.jpg">    </p:cNvPr>
+          <p:cNvPr id="10" name="Image 1" descr="submissions/assets/2026-10-16/fig_desktop_viewer.jpg">    </p:cNvPr>
           <p:cNvPicPr>
             <a:picLocks noChangeAspect="1"/>
           </p:cNvPicPr>
@@ -19045,7 +19109,7 @@
       </p:sp>
       <p:pic>
         <p:nvPicPr>
-          <p:cNvPr id="5" name="Image 0" descr="/private/tmp/ps-deck-wt/submissions/assets/2026-10-16/fig_nextview.png">    </p:cNvPr>
+          <p:cNvPr id="5" name="Image 0" descr="submissions/assets/2026-10-16/fig_nextview.png">    </p:cNvPr>
           <p:cNvPicPr>
             <a:picLocks noChangeAspect="1"/>
           </p:cNvPicPr>
